--- a/Database/HFPA_Template_Backup.pptx
+++ b/Database/HFPA_Template_Backup.pptx
@@ -21069,49 +21069,6 @@
           </a:prstGeom>
         </p:spPr>
       </p:pic>
-      <p:sp>
-        <p:nvSpPr>
-          <p:cNvPr id="56" name="Rectangle 55"/>
-          <p:cNvSpPr/>
-          <p:nvPr/>
-        </p:nvSpPr>
-        <p:spPr>
-          <a:xfrm>
-            <a:off x="12192000" y="1491916"/>
-            <a:ext cx="1581752" cy="1318661"/>
-          </a:xfrm>
-          <a:prstGeom prst="rect">
-            <a:avLst/>
-          </a:prstGeom>
-        </p:spPr>
-        <p:style>
-          <a:lnRef idx="2">
-            <a:schemeClr val="accent1">
-              <a:shade val="50000"/>
-            </a:schemeClr>
-          </a:lnRef>
-          <a:fillRef idx="1">
-            <a:schemeClr val="accent1"/>
-          </a:fillRef>
-          <a:effectRef idx="0">
-            <a:schemeClr val="accent1"/>
-          </a:effectRef>
-          <a:fontRef idx="minor">
-            <a:schemeClr val="lt1"/>
-          </a:fontRef>
-        </p:style>
-        <p:txBody>
-          <a:bodyPr rtlCol="0" anchor="ctr"/>
-          <a:lstStyle/>
-          <a:p>
-            <a:r>
-              <a:rPr lang="en-US" sz="1400"/>
-              <a:t>Lưu ý về mức độ ưu tiên cải thiện lỗi: ưu tiên lỗi đó có nhiều model nhất sau đó sẽ xét tỷ lệ phần trăm</a:t>
-            </a:r>
-            <a:endParaRPr lang="vi-VN" sz="1400"/>
-          </a:p>
-        </p:txBody>
-      </p:sp>
     </p:spTree>
   </p:cSld>
   <p:clrMapOvr>
